--- a/Presentation.pptx
+++ b/Presentation.pptx
@@ -6195,7 +6195,7 @@
         </p:blipFill>
         <p:spPr>
           <a:xfrm>
-            <a:off x="0" y="0"/>
+            <a:off x="-15193" y="0"/>
             <a:ext cx="12207193" cy="6849476"/>
           </a:xfrm>
           <a:prstGeom prst="rect">
@@ -6217,8 +6217,8 @@
         </p:nvSpPr>
         <p:spPr>
           <a:xfrm>
-            <a:off x="2085729" y="73454"/>
-            <a:ext cx="7464672" cy="657485"/>
+            <a:off x="4004733" y="73454"/>
+            <a:ext cx="3903134" cy="657485"/>
           </a:xfrm>
           <a:prstGeom prst="roundRect">
             <a:avLst/>
@@ -6254,7 +6254,7 @@
               </a:lnSpc>
             </a:pPr>
             <a:r>
-              <a:rPr lang="en-US" sz="3000" b="1" dirty="0">
+              <a:rPr lang="en-US" sz="4400" b="1" dirty="0">
                 <a:solidFill>
                   <a:srgbClr val="055E55"/>
                 </a:solidFill>
@@ -6265,9 +6265,22 @@
                     </a:prstClr>
                   </a:outerShdw>
                 </a:effectLst>
+                <a:hlinkClick r:id="rId3"/>
               </a:rPr>
               <a:t>Solution</a:t>
             </a:r>
+            <a:endParaRPr lang="en-US" sz="4400" b="1" dirty="0">
+              <a:solidFill>
+                <a:srgbClr val="055E55"/>
+              </a:solidFill>
+              <a:effectLst>
+                <a:outerShdw blurRad="50800" dist="38100" dir="5400000" algn="t" rotWithShape="0">
+                  <a:prstClr val="black">
+                    <a:alpha val="40000"/>
+                  </a:prstClr>
+                </a:outerShdw>
+              </a:effectLst>
+            </a:endParaRPr>
           </a:p>
         </p:txBody>
       </p:sp>
@@ -6686,8 +6699,8 @@
         </p:nvSpPr>
         <p:spPr>
           <a:xfrm>
-            <a:off x="1733964" y="882481"/>
-            <a:ext cx="3693169" cy="588601"/>
+            <a:off x="1501168" y="882481"/>
+            <a:ext cx="3570365" cy="588601"/>
           </a:xfrm>
           <a:prstGeom prst="rect">
             <a:avLst/>
@@ -6719,7 +6732,7 @@
           <a:p>
             <a:pPr algn="ctr"/>
             <a:r>
-              <a:rPr lang="en-US" dirty="0"/>
+              <a:rPr lang="en-US" b="1" dirty="0"/>
               <a:t>Centralize data in PostgreSQL</a:t>
             </a:r>
           </a:p>
@@ -7333,6 +7346,71 @@
               <a:t>Documents: RAG + Obsidian</a:t>
             </a:r>
             <a:endParaRPr lang="en-US" dirty="0"/>
+          </a:p>
+        </p:txBody>
+      </p:sp>
+      <p:sp>
+        <p:nvSpPr>
+          <p:cNvPr id="22" name="Rectangle: Rounded Corners 21">
+            <a:extLst>
+              <a:ext uri="{FF2B5EF4-FFF2-40B4-BE49-F238E27FC236}">
+                <a16:creationId xmlns:a16="http://schemas.microsoft.com/office/drawing/2014/main" id="{08391389-4813-13E9-F18F-FC5C9391E875}"/>
+              </a:ext>
+            </a:extLst>
+          </p:cNvPr>
+          <p:cNvSpPr/>
+          <p:nvPr/>
+        </p:nvSpPr>
+        <p:spPr>
+          <a:xfrm>
+            <a:off x="3454400" y="49800"/>
+            <a:ext cx="8813800" cy="634605"/>
+          </a:xfrm>
+          <a:prstGeom prst="roundRect">
+            <a:avLst/>
+          </a:prstGeom>
+          <a:noFill/>
+          <a:ln>
+            <a:noFill/>
+          </a:ln>
+        </p:spPr>
+        <p:style>
+          <a:lnRef idx="2">
+            <a:schemeClr val="accent1">
+              <a:shade val="15000"/>
+            </a:schemeClr>
+          </a:lnRef>
+          <a:fillRef idx="1">
+            <a:schemeClr val="accent1"/>
+          </a:fillRef>
+          <a:effectRef idx="0">
+            <a:schemeClr val="accent1"/>
+          </a:effectRef>
+          <a:fontRef idx="minor">
+            <a:schemeClr val="lt1"/>
+          </a:fontRef>
+        </p:style>
+        <p:txBody>
+          <a:bodyPr rtlCol="0" anchor="ctr"/>
+          <a:lstStyle/>
+          <a:p>
+            <a:pPr>
+              <a:lnSpc>
+                <a:spcPts val="6000"/>
+              </a:lnSpc>
+            </a:pPr>
+            <a:endParaRPr lang="en-US" sz="2500" b="1" dirty="0">
+              <a:solidFill>
+                <a:schemeClr val="bg1"/>
+              </a:solidFill>
+              <a:effectLst>
+                <a:outerShdw blurRad="50800" dist="38100" dir="5400000" algn="t" rotWithShape="0">
+                  <a:prstClr val="black">
+                    <a:alpha val="40000"/>
+                  </a:prstClr>
+                </a:outerShdw>
+              </a:effectLst>
+            </a:endParaRPr>
           </a:p>
         </p:txBody>
       </p:sp>
@@ -7394,7 +7472,7 @@
         </p:blipFill>
         <p:spPr>
           <a:xfrm>
-            <a:off x="0" y="8524"/>
+            <a:off x="0" y="0"/>
             <a:ext cx="12207193" cy="6849476"/>
           </a:xfrm>
           <a:prstGeom prst="rect">
@@ -7402,6 +7480,1426 @@
           </a:prstGeom>
         </p:spPr>
       </p:pic>
+      <p:sp>
+        <p:nvSpPr>
+          <p:cNvPr id="2" name="Rectangle: Rounded Corners 1">
+            <a:extLst>
+              <a:ext uri="{FF2B5EF4-FFF2-40B4-BE49-F238E27FC236}">
+                <a16:creationId xmlns:a16="http://schemas.microsoft.com/office/drawing/2014/main" id="{6A9AF512-69BC-DF6F-081F-6F4A2F75BDD3}"/>
+              </a:ext>
+            </a:extLst>
+          </p:cNvPr>
+          <p:cNvSpPr/>
+          <p:nvPr/>
+        </p:nvSpPr>
+        <p:spPr>
+          <a:xfrm>
+            <a:off x="3928531" y="-8491"/>
+            <a:ext cx="4131734" cy="574328"/>
+          </a:xfrm>
+          <a:prstGeom prst="roundRect">
+            <a:avLst/>
+          </a:prstGeom>
+          <a:noFill/>
+          <a:ln>
+            <a:noFill/>
+          </a:ln>
+        </p:spPr>
+        <p:style>
+          <a:lnRef idx="2">
+            <a:schemeClr val="accent1">
+              <a:shade val="15000"/>
+            </a:schemeClr>
+          </a:lnRef>
+          <a:fillRef idx="1">
+            <a:schemeClr val="accent1"/>
+          </a:fillRef>
+          <a:effectRef idx="0">
+            <a:schemeClr val="accent1"/>
+          </a:effectRef>
+          <a:fontRef idx="minor">
+            <a:schemeClr val="lt1"/>
+          </a:fontRef>
+        </p:style>
+        <p:txBody>
+          <a:bodyPr rtlCol="0" anchor="ctr"/>
+          <a:lstStyle/>
+          <a:p>
+            <a:pPr algn="ctr">
+              <a:lnSpc>
+                <a:spcPts val="4000"/>
+              </a:lnSpc>
+            </a:pPr>
+            <a:r>
+              <a:rPr lang="en-US" sz="4400" b="1" dirty="0">
+                <a:solidFill>
+                  <a:srgbClr val="055E55"/>
+                </a:solidFill>
+                <a:effectLst>
+                  <a:outerShdw blurRad="50800" dist="38100" dir="5400000" algn="t" rotWithShape="0">
+                    <a:prstClr val="black">
+                      <a:alpha val="40000"/>
+                    </a:prstClr>
+                  </a:outerShdw>
+                </a:effectLst>
+              </a:rPr>
+              <a:t>How it works</a:t>
+            </a:r>
+          </a:p>
+        </p:txBody>
+      </p:sp>
+      <p:sp>
+        <p:nvSpPr>
+          <p:cNvPr id="3" name="Rectangle: Rounded Corners 2">
+            <a:extLst>
+              <a:ext uri="{FF2B5EF4-FFF2-40B4-BE49-F238E27FC236}">
+                <a16:creationId xmlns:a16="http://schemas.microsoft.com/office/drawing/2014/main" id="{DA1F6F30-8C62-DB2E-E501-64C58487D56D}"/>
+              </a:ext>
+            </a:extLst>
+          </p:cNvPr>
+          <p:cNvSpPr/>
+          <p:nvPr/>
+        </p:nvSpPr>
+        <p:spPr>
+          <a:xfrm>
+            <a:off x="494428" y="1065996"/>
+            <a:ext cx="2821143" cy="1094145"/>
+          </a:xfrm>
+          <a:prstGeom prst="roundRect">
+            <a:avLst/>
+          </a:prstGeom>
+          <a:solidFill>
+            <a:srgbClr val="0B9486"/>
+          </a:solidFill>
+        </p:spPr>
+        <p:style>
+          <a:lnRef idx="2">
+            <a:schemeClr val="accent3">
+              <a:shade val="15000"/>
+            </a:schemeClr>
+          </a:lnRef>
+          <a:fillRef idx="1">
+            <a:schemeClr val="accent3"/>
+          </a:fillRef>
+          <a:effectRef idx="0">
+            <a:schemeClr val="accent3"/>
+          </a:effectRef>
+          <a:fontRef idx="minor">
+            <a:schemeClr val="lt1"/>
+          </a:fontRef>
+        </p:style>
+        <p:txBody>
+          <a:bodyPr rtlCol="0" anchor="ctr"/>
+          <a:lstStyle/>
+          <a:p>
+            <a:r>
+              <a:rPr lang="en-US" dirty="0"/>
+              <a:t>Upload             PostgreSQL</a:t>
+            </a:r>
+          </a:p>
+          <a:p>
+            <a:r>
+              <a:rPr lang="en-US" dirty="0"/>
+              <a:t>Type                    ( ledger </a:t>
+            </a:r>
+          </a:p>
+          <a:p>
+            <a:r>
+              <a:rPr lang="en-US" dirty="0"/>
+              <a:t>link bank           + history) </a:t>
+            </a:r>
+          </a:p>
+        </p:txBody>
+      </p:sp>
+      <p:sp>
+        <p:nvSpPr>
+          <p:cNvPr id="4" name="Rectangle: Rounded Corners 3">
+            <a:extLst>
+              <a:ext uri="{FF2B5EF4-FFF2-40B4-BE49-F238E27FC236}">
+                <a16:creationId xmlns:a16="http://schemas.microsoft.com/office/drawing/2014/main" id="{7045E77B-7B42-8A7E-64FC-0CE8C7087F90}"/>
+              </a:ext>
+            </a:extLst>
+          </p:cNvPr>
+          <p:cNvSpPr/>
+          <p:nvPr/>
+        </p:nvSpPr>
+        <p:spPr>
+          <a:xfrm>
+            <a:off x="4287615" y="1030813"/>
+            <a:ext cx="3158065" cy="1094144"/>
+          </a:xfrm>
+          <a:prstGeom prst="roundRect">
+            <a:avLst/>
+          </a:prstGeom>
+          <a:solidFill>
+            <a:srgbClr val="0B9486"/>
+          </a:solidFill>
+        </p:spPr>
+        <p:style>
+          <a:lnRef idx="2">
+            <a:schemeClr val="accent3">
+              <a:shade val="15000"/>
+            </a:schemeClr>
+          </a:lnRef>
+          <a:fillRef idx="1">
+            <a:schemeClr val="accent3"/>
+          </a:fillRef>
+          <a:effectRef idx="0">
+            <a:schemeClr val="accent3"/>
+          </a:effectRef>
+          <a:fontRef idx="minor">
+            <a:schemeClr val="lt1"/>
+          </a:fontRef>
+        </p:style>
+        <p:txBody>
+          <a:bodyPr rtlCol="0" anchor="ctr"/>
+          <a:lstStyle/>
+          <a:p>
+            <a:r>
+              <a:rPr lang="en-US" dirty="0"/>
+              <a:t>Engines (forecast, lookup, Plaid)</a:t>
+            </a:r>
+          </a:p>
+        </p:txBody>
+      </p:sp>
+      <p:sp>
+        <p:nvSpPr>
+          <p:cNvPr id="6" name="Rectangle: Rounded Corners 5">
+            <a:extLst>
+              <a:ext uri="{FF2B5EF4-FFF2-40B4-BE49-F238E27FC236}">
+                <a16:creationId xmlns:a16="http://schemas.microsoft.com/office/drawing/2014/main" id="{CB0B74FF-4A5B-A8D0-239C-C5BF64C5133C}"/>
+              </a:ext>
+            </a:extLst>
+          </p:cNvPr>
+          <p:cNvSpPr/>
+          <p:nvPr/>
+        </p:nvSpPr>
+        <p:spPr>
+          <a:xfrm>
+            <a:off x="8398065" y="972524"/>
+            <a:ext cx="2744063" cy="1187617"/>
+          </a:xfrm>
+          <a:prstGeom prst="roundRect">
+            <a:avLst/>
+          </a:prstGeom>
+          <a:solidFill>
+            <a:srgbClr val="0B9486"/>
+          </a:solidFill>
+        </p:spPr>
+        <p:style>
+          <a:lnRef idx="2">
+            <a:schemeClr val="accent3">
+              <a:shade val="15000"/>
+            </a:schemeClr>
+          </a:lnRef>
+          <a:fillRef idx="1">
+            <a:schemeClr val="accent3"/>
+          </a:fillRef>
+          <a:effectRef idx="0">
+            <a:schemeClr val="accent3"/>
+          </a:effectRef>
+          <a:fontRef idx="minor">
+            <a:schemeClr val="lt1"/>
+          </a:fontRef>
+        </p:style>
+        <p:txBody>
+          <a:bodyPr rtlCol="0" anchor="ctr"/>
+          <a:lstStyle/>
+          <a:p>
+            <a:pPr algn="ctr"/>
+            <a:r>
+              <a:rPr lang="en-US" dirty="0"/>
+              <a:t>AI (explain + RAG) — never invents totals</a:t>
+            </a:r>
+          </a:p>
+        </p:txBody>
+      </p:sp>
+      <p:cxnSp>
+        <p:nvCxnSpPr>
+          <p:cNvPr id="8" name="Straight Arrow Connector 7">
+            <a:extLst>
+              <a:ext uri="{FF2B5EF4-FFF2-40B4-BE49-F238E27FC236}">
+                <a16:creationId xmlns:a16="http://schemas.microsoft.com/office/drawing/2014/main" id="{175F299C-A332-ED87-5830-7693D5B36507}"/>
+              </a:ext>
+            </a:extLst>
+          </p:cNvPr>
+          <p:cNvCxnSpPr>
+            <a:cxnSpLocks/>
+          </p:cNvCxnSpPr>
+          <p:nvPr/>
+        </p:nvCxnSpPr>
+        <p:spPr>
+          <a:xfrm>
+            <a:off x="3315571" y="1577884"/>
+            <a:ext cx="988859" cy="0"/>
+          </a:xfrm>
+          <a:prstGeom prst="straightConnector1">
+            <a:avLst/>
+          </a:prstGeom>
+          <a:ln w="19050" cap="flat" cmpd="sng" algn="ctr">
+            <a:solidFill>
+              <a:schemeClr val="accent3"/>
+            </a:solidFill>
+            <a:prstDash val="solid"/>
+            <a:round/>
+            <a:headEnd type="none" w="med" len="med"/>
+            <a:tailEnd type="arrow" w="med" len="med"/>
+          </a:ln>
+        </p:spPr>
+        <p:style>
+          <a:lnRef idx="0">
+            <a:scrgbClr r="0" g="0" b="0"/>
+          </a:lnRef>
+          <a:fillRef idx="0">
+            <a:scrgbClr r="0" g="0" b="0"/>
+          </a:fillRef>
+          <a:effectRef idx="0">
+            <a:scrgbClr r="0" g="0" b="0"/>
+          </a:effectRef>
+          <a:fontRef idx="minor">
+            <a:schemeClr val="tx1"/>
+          </a:fontRef>
+        </p:style>
+      </p:cxnSp>
+      <p:cxnSp>
+        <p:nvCxnSpPr>
+          <p:cNvPr id="9" name="Straight Arrow Connector 8">
+            <a:extLst>
+              <a:ext uri="{FF2B5EF4-FFF2-40B4-BE49-F238E27FC236}">
+                <a16:creationId xmlns:a16="http://schemas.microsoft.com/office/drawing/2014/main" id="{BF79077A-1AAE-8D36-6FCD-9A1D91A53B8F}"/>
+              </a:ext>
+            </a:extLst>
+          </p:cNvPr>
+          <p:cNvCxnSpPr>
+            <a:cxnSpLocks/>
+          </p:cNvCxnSpPr>
+          <p:nvPr/>
+        </p:nvCxnSpPr>
+        <p:spPr>
+          <a:xfrm>
+            <a:off x="7425266" y="1566332"/>
+            <a:ext cx="972799" cy="0"/>
+          </a:xfrm>
+          <a:prstGeom prst="straightConnector1">
+            <a:avLst/>
+          </a:prstGeom>
+          <a:ln w="19050" cap="flat" cmpd="sng" algn="ctr">
+            <a:solidFill>
+              <a:schemeClr val="accent3"/>
+            </a:solidFill>
+            <a:prstDash val="solid"/>
+            <a:round/>
+            <a:headEnd type="none" w="med" len="med"/>
+            <a:tailEnd type="arrow" w="med" len="med"/>
+          </a:ln>
+        </p:spPr>
+        <p:style>
+          <a:lnRef idx="0">
+            <a:scrgbClr r="0" g="0" b="0"/>
+          </a:lnRef>
+          <a:fillRef idx="0">
+            <a:scrgbClr r="0" g="0" b="0"/>
+          </a:fillRef>
+          <a:effectRef idx="0">
+            <a:scrgbClr r="0" g="0" b="0"/>
+          </a:effectRef>
+          <a:fontRef idx="minor">
+            <a:schemeClr val="tx1"/>
+          </a:fontRef>
+        </p:style>
+      </p:cxnSp>
+      <p:sp>
+        <p:nvSpPr>
+          <p:cNvPr id="10" name="Rectangle: Rounded Corners 9">
+            <a:extLst>
+              <a:ext uri="{FF2B5EF4-FFF2-40B4-BE49-F238E27FC236}">
+                <a16:creationId xmlns:a16="http://schemas.microsoft.com/office/drawing/2014/main" id="{85AC56BF-A335-5B24-AC0C-03BC4B0AA7F6}"/>
+              </a:ext>
+            </a:extLst>
+          </p:cNvPr>
+          <p:cNvSpPr/>
+          <p:nvPr/>
+        </p:nvSpPr>
+        <p:spPr>
+          <a:xfrm>
+            <a:off x="5033430" y="2258942"/>
+            <a:ext cx="1735666" cy="710540"/>
+          </a:xfrm>
+          <a:prstGeom prst="roundRect">
+            <a:avLst/>
+          </a:prstGeom>
+          <a:solidFill>
+            <a:srgbClr val="055E55"/>
+          </a:solidFill>
+        </p:spPr>
+        <p:style>
+          <a:lnRef idx="2">
+            <a:schemeClr val="accent3">
+              <a:shade val="15000"/>
+            </a:schemeClr>
+          </a:lnRef>
+          <a:fillRef idx="1">
+            <a:schemeClr val="accent3"/>
+          </a:fillRef>
+          <a:effectRef idx="0">
+            <a:schemeClr val="accent3"/>
+          </a:effectRef>
+          <a:fontRef idx="minor">
+            <a:schemeClr val="lt1"/>
+          </a:fontRef>
+        </p:style>
+        <p:txBody>
+          <a:bodyPr rtlCol="0" anchor="ctr"/>
+          <a:lstStyle/>
+          <a:p>
+            <a:pPr algn="ctr">
+              <a:lnSpc>
+                <a:spcPts val="1600"/>
+              </a:lnSpc>
+            </a:pPr>
+            <a:r>
+              <a:rPr lang="en-US" b="1" dirty="0"/>
+              <a:t>Household Finance Intelligence</a:t>
+            </a:r>
+            <a:endParaRPr lang="en-US" dirty="0"/>
+          </a:p>
+        </p:txBody>
+      </p:sp>
+      <p:sp>
+        <p:nvSpPr>
+          <p:cNvPr id="11" name="Rectangle: Rounded Corners 10">
+            <a:extLst>
+              <a:ext uri="{FF2B5EF4-FFF2-40B4-BE49-F238E27FC236}">
+                <a16:creationId xmlns:a16="http://schemas.microsoft.com/office/drawing/2014/main" id="{3E5BD9CD-29BB-A193-9726-9BB3FA88E1D0}"/>
+              </a:ext>
+            </a:extLst>
+          </p:cNvPr>
+          <p:cNvSpPr/>
+          <p:nvPr/>
+        </p:nvSpPr>
+        <p:spPr>
+          <a:xfrm>
+            <a:off x="292097" y="3512008"/>
+            <a:ext cx="1735666" cy="710540"/>
+          </a:xfrm>
+          <a:prstGeom prst="roundRect">
+            <a:avLst/>
+          </a:prstGeom>
+          <a:solidFill>
+            <a:srgbClr val="055E55"/>
+          </a:solidFill>
+        </p:spPr>
+        <p:style>
+          <a:lnRef idx="2">
+            <a:schemeClr val="accent3">
+              <a:shade val="15000"/>
+            </a:schemeClr>
+          </a:lnRef>
+          <a:fillRef idx="1">
+            <a:schemeClr val="accent3"/>
+          </a:fillRef>
+          <a:effectRef idx="0">
+            <a:schemeClr val="accent3"/>
+          </a:effectRef>
+          <a:fontRef idx="minor">
+            <a:schemeClr val="lt1"/>
+          </a:fontRef>
+        </p:style>
+        <p:txBody>
+          <a:bodyPr rtlCol="0" anchor="ctr"/>
+          <a:lstStyle/>
+          <a:p>
+            <a:pPr algn="ctr">
+              <a:lnSpc>
+                <a:spcPts val="1600"/>
+              </a:lnSpc>
+            </a:pPr>
+            <a:r>
+              <a:rPr lang="en-US" b="1" dirty="0"/>
+              <a:t>Documents</a:t>
+            </a:r>
+            <a:endParaRPr lang="en-US" dirty="0"/>
+          </a:p>
+        </p:txBody>
+      </p:sp>
+      <p:sp>
+        <p:nvSpPr>
+          <p:cNvPr id="13" name="Rectangle: Rounded Corners 12">
+            <a:extLst>
+              <a:ext uri="{FF2B5EF4-FFF2-40B4-BE49-F238E27FC236}">
+                <a16:creationId xmlns:a16="http://schemas.microsoft.com/office/drawing/2014/main" id="{17B9054A-991D-F704-AAAA-FBF0AF165206}"/>
+              </a:ext>
+            </a:extLst>
+          </p:cNvPr>
+          <p:cNvSpPr/>
+          <p:nvPr/>
+        </p:nvSpPr>
+        <p:spPr>
+          <a:xfrm>
+            <a:off x="5033430" y="3520499"/>
+            <a:ext cx="1735666" cy="710540"/>
+          </a:xfrm>
+          <a:prstGeom prst="roundRect">
+            <a:avLst/>
+          </a:prstGeom>
+          <a:solidFill>
+            <a:srgbClr val="055E55"/>
+          </a:solidFill>
+        </p:spPr>
+        <p:style>
+          <a:lnRef idx="2">
+            <a:schemeClr val="accent3">
+              <a:shade val="15000"/>
+            </a:schemeClr>
+          </a:lnRef>
+          <a:fillRef idx="1">
+            <a:schemeClr val="accent3"/>
+          </a:fillRef>
+          <a:effectRef idx="0">
+            <a:schemeClr val="accent3"/>
+          </a:effectRef>
+          <a:fontRef idx="minor">
+            <a:schemeClr val="lt1"/>
+          </a:fontRef>
+        </p:style>
+        <p:txBody>
+          <a:bodyPr rtlCol="0" anchor="ctr"/>
+          <a:lstStyle/>
+          <a:p>
+            <a:pPr algn="ctr">
+              <a:lnSpc>
+                <a:spcPts val="1600"/>
+              </a:lnSpc>
+            </a:pPr>
+            <a:r>
+              <a:rPr lang="en-US" b="1" dirty="0"/>
+              <a:t>Live money</a:t>
+            </a:r>
+            <a:endParaRPr lang="en-US" dirty="0"/>
+          </a:p>
+        </p:txBody>
+      </p:sp>
+      <p:sp>
+        <p:nvSpPr>
+          <p:cNvPr id="14" name="Rectangle: Rounded Corners 13">
+            <a:extLst>
+              <a:ext uri="{FF2B5EF4-FFF2-40B4-BE49-F238E27FC236}">
+                <a16:creationId xmlns:a16="http://schemas.microsoft.com/office/drawing/2014/main" id="{CE06EA0F-A1FD-50CA-8D37-2D5CEC9CDDFF}"/>
+              </a:ext>
+            </a:extLst>
+          </p:cNvPr>
+          <p:cNvSpPr/>
+          <p:nvPr/>
+        </p:nvSpPr>
+        <p:spPr>
+          <a:xfrm>
+            <a:off x="10113805" y="3554669"/>
+            <a:ext cx="1735666" cy="710540"/>
+          </a:xfrm>
+          <a:prstGeom prst="roundRect">
+            <a:avLst/>
+          </a:prstGeom>
+          <a:solidFill>
+            <a:srgbClr val="055E55"/>
+          </a:solidFill>
+        </p:spPr>
+        <p:style>
+          <a:lnRef idx="2">
+            <a:schemeClr val="accent3">
+              <a:shade val="15000"/>
+            </a:schemeClr>
+          </a:lnRef>
+          <a:fillRef idx="1">
+            <a:schemeClr val="accent3"/>
+          </a:fillRef>
+          <a:effectRef idx="0">
+            <a:schemeClr val="accent3"/>
+          </a:effectRef>
+          <a:fontRef idx="minor">
+            <a:schemeClr val="lt1"/>
+          </a:fontRef>
+        </p:style>
+        <p:txBody>
+          <a:bodyPr rtlCol="0" anchor="ctr"/>
+          <a:lstStyle/>
+          <a:p>
+            <a:pPr algn="ctr">
+              <a:lnSpc>
+                <a:spcPts val="1600"/>
+              </a:lnSpc>
+            </a:pPr>
+            <a:r>
+              <a:rPr lang="en-US" b="1" dirty="0"/>
+              <a:t>Ask questions</a:t>
+            </a:r>
+            <a:endParaRPr lang="en-US" dirty="0"/>
+          </a:p>
+        </p:txBody>
+      </p:sp>
+      <p:cxnSp>
+        <p:nvCxnSpPr>
+          <p:cNvPr id="20" name="Straight Arrow Connector 19">
+            <a:extLst>
+              <a:ext uri="{FF2B5EF4-FFF2-40B4-BE49-F238E27FC236}">
+                <a16:creationId xmlns:a16="http://schemas.microsoft.com/office/drawing/2014/main" id="{C692FD03-4081-FA51-E085-1C643F8AEEF8}"/>
+              </a:ext>
+            </a:extLst>
+          </p:cNvPr>
+          <p:cNvCxnSpPr/>
+          <p:nvPr/>
+        </p:nvCxnSpPr>
+        <p:spPr>
+          <a:xfrm>
+            <a:off x="1159930" y="3172686"/>
+            <a:ext cx="0" cy="339322"/>
+          </a:xfrm>
+          <a:prstGeom prst="straightConnector1">
+            <a:avLst/>
+          </a:prstGeom>
+          <a:ln w="19050" cap="flat" cmpd="sng" algn="ctr">
+            <a:solidFill>
+              <a:schemeClr val="accent3"/>
+            </a:solidFill>
+            <a:prstDash val="solid"/>
+            <a:round/>
+            <a:headEnd type="none" w="med" len="med"/>
+            <a:tailEnd type="arrow" w="med" len="med"/>
+          </a:ln>
+        </p:spPr>
+        <p:style>
+          <a:lnRef idx="0">
+            <a:scrgbClr r="0" g="0" b="0"/>
+          </a:lnRef>
+          <a:fillRef idx="0">
+            <a:scrgbClr r="0" g="0" b="0"/>
+          </a:fillRef>
+          <a:effectRef idx="0">
+            <a:scrgbClr r="0" g="0" b="0"/>
+          </a:effectRef>
+          <a:fontRef idx="minor">
+            <a:schemeClr val="tx1"/>
+          </a:fontRef>
+        </p:style>
+      </p:cxnSp>
+      <p:cxnSp>
+        <p:nvCxnSpPr>
+          <p:cNvPr id="21" name="Straight Arrow Connector 20">
+            <a:extLst>
+              <a:ext uri="{FF2B5EF4-FFF2-40B4-BE49-F238E27FC236}">
+                <a16:creationId xmlns:a16="http://schemas.microsoft.com/office/drawing/2014/main" id="{5195BAD9-3F25-BC7D-6C04-A0F09260643B}"/>
+              </a:ext>
+            </a:extLst>
+          </p:cNvPr>
+          <p:cNvCxnSpPr/>
+          <p:nvPr/>
+        </p:nvCxnSpPr>
+        <p:spPr>
+          <a:xfrm>
+            <a:off x="5901263" y="3172686"/>
+            <a:ext cx="0" cy="339322"/>
+          </a:xfrm>
+          <a:prstGeom prst="straightConnector1">
+            <a:avLst/>
+          </a:prstGeom>
+          <a:ln w="19050" cap="flat" cmpd="sng" algn="ctr">
+            <a:solidFill>
+              <a:schemeClr val="accent3"/>
+            </a:solidFill>
+            <a:prstDash val="solid"/>
+            <a:round/>
+            <a:headEnd type="none" w="med" len="med"/>
+            <a:tailEnd type="arrow" w="med" len="med"/>
+          </a:ln>
+        </p:spPr>
+        <p:style>
+          <a:lnRef idx="0">
+            <a:scrgbClr r="0" g="0" b="0"/>
+          </a:lnRef>
+          <a:fillRef idx="0">
+            <a:scrgbClr r="0" g="0" b="0"/>
+          </a:fillRef>
+          <a:effectRef idx="0">
+            <a:scrgbClr r="0" g="0" b="0"/>
+          </a:effectRef>
+          <a:fontRef idx="minor">
+            <a:schemeClr val="tx1"/>
+          </a:fontRef>
+        </p:style>
+      </p:cxnSp>
+      <p:cxnSp>
+        <p:nvCxnSpPr>
+          <p:cNvPr id="23" name="Straight Arrow Connector 22">
+            <a:extLst>
+              <a:ext uri="{FF2B5EF4-FFF2-40B4-BE49-F238E27FC236}">
+                <a16:creationId xmlns:a16="http://schemas.microsoft.com/office/drawing/2014/main" id="{A66A5659-A96D-3E84-3431-26B1265EC3B0}"/>
+              </a:ext>
+            </a:extLst>
+          </p:cNvPr>
+          <p:cNvCxnSpPr/>
+          <p:nvPr/>
+        </p:nvCxnSpPr>
+        <p:spPr>
+          <a:xfrm>
+            <a:off x="10981638" y="3215347"/>
+            <a:ext cx="0" cy="339322"/>
+          </a:xfrm>
+          <a:prstGeom prst="straightConnector1">
+            <a:avLst/>
+          </a:prstGeom>
+          <a:ln w="19050" cap="flat" cmpd="sng" algn="ctr">
+            <a:solidFill>
+              <a:schemeClr val="accent3"/>
+            </a:solidFill>
+            <a:prstDash val="solid"/>
+            <a:round/>
+            <a:headEnd type="none" w="med" len="med"/>
+            <a:tailEnd type="arrow" w="med" len="med"/>
+          </a:ln>
+        </p:spPr>
+        <p:style>
+          <a:lnRef idx="0">
+            <a:scrgbClr r="0" g="0" b="0"/>
+          </a:lnRef>
+          <a:fillRef idx="0">
+            <a:scrgbClr r="0" g="0" b="0"/>
+          </a:fillRef>
+          <a:effectRef idx="0">
+            <a:scrgbClr r="0" g="0" b="0"/>
+          </a:effectRef>
+          <a:fontRef idx="minor">
+            <a:schemeClr val="tx1"/>
+          </a:fontRef>
+        </p:style>
+      </p:cxnSp>
+      <p:cxnSp>
+        <p:nvCxnSpPr>
+          <p:cNvPr id="32" name="Straight Connector 31">
+            <a:extLst>
+              <a:ext uri="{FF2B5EF4-FFF2-40B4-BE49-F238E27FC236}">
+                <a16:creationId xmlns:a16="http://schemas.microsoft.com/office/drawing/2014/main" id="{52B4CE0D-6822-F134-7938-1C4557A71F01}"/>
+              </a:ext>
+            </a:extLst>
+          </p:cNvPr>
+          <p:cNvCxnSpPr/>
+          <p:nvPr/>
+        </p:nvCxnSpPr>
+        <p:spPr>
+          <a:xfrm>
+            <a:off x="1159930" y="3172686"/>
+            <a:ext cx="9821708" cy="42661"/>
+          </a:xfrm>
+          <a:prstGeom prst="line">
+            <a:avLst/>
+          </a:prstGeom>
+        </p:spPr>
+        <p:style>
+          <a:lnRef idx="2">
+            <a:schemeClr val="accent3"/>
+          </a:lnRef>
+          <a:fillRef idx="0">
+            <a:schemeClr val="accent3"/>
+          </a:fillRef>
+          <a:effectRef idx="1">
+            <a:schemeClr val="accent3"/>
+          </a:effectRef>
+          <a:fontRef idx="minor">
+            <a:schemeClr val="tx1"/>
+          </a:fontRef>
+        </p:style>
+      </p:cxnSp>
+      <p:cxnSp>
+        <p:nvCxnSpPr>
+          <p:cNvPr id="34" name="Straight Connector 33">
+            <a:extLst>
+              <a:ext uri="{FF2B5EF4-FFF2-40B4-BE49-F238E27FC236}">
+                <a16:creationId xmlns:a16="http://schemas.microsoft.com/office/drawing/2014/main" id="{91EED048-4F74-FD6F-B27F-23D91EB99C04}"/>
+              </a:ext>
+            </a:extLst>
+          </p:cNvPr>
+          <p:cNvCxnSpPr/>
+          <p:nvPr/>
+        </p:nvCxnSpPr>
+        <p:spPr>
+          <a:xfrm>
+            <a:off x="5901263" y="2969482"/>
+            <a:ext cx="0" cy="203204"/>
+          </a:xfrm>
+          <a:prstGeom prst="line">
+            <a:avLst/>
+          </a:prstGeom>
+        </p:spPr>
+        <p:style>
+          <a:lnRef idx="2">
+            <a:schemeClr val="accent3"/>
+          </a:lnRef>
+          <a:fillRef idx="0">
+            <a:schemeClr val="accent3"/>
+          </a:fillRef>
+          <a:effectRef idx="1">
+            <a:schemeClr val="accent3"/>
+          </a:effectRef>
+          <a:fontRef idx="minor">
+            <a:schemeClr val="tx1"/>
+          </a:fontRef>
+        </p:style>
+      </p:cxnSp>
+      <p:sp>
+        <p:nvSpPr>
+          <p:cNvPr id="35" name="Rectangle: Rounded Corners 34">
+            <a:extLst>
+              <a:ext uri="{FF2B5EF4-FFF2-40B4-BE49-F238E27FC236}">
+                <a16:creationId xmlns:a16="http://schemas.microsoft.com/office/drawing/2014/main" id="{4BAA4220-DFCB-5D14-7974-B725FE4F7A33}"/>
+              </a:ext>
+            </a:extLst>
+          </p:cNvPr>
+          <p:cNvSpPr/>
+          <p:nvPr/>
+        </p:nvSpPr>
+        <p:spPr>
+          <a:xfrm>
+            <a:off x="762001" y="472501"/>
+            <a:ext cx="2167467" cy="493187"/>
+          </a:xfrm>
+          <a:prstGeom prst="roundRect">
+            <a:avLst/>
+          </a:prstGeom>
+          <a:solidFill>
+            <a:srgbClr val="0B9486"/>
+          </a:solidFill>
+        </p:spPr>
+        <p:style>
+          <a:lnRef idx="2">
+            <a:schemeClr val="accent3">
+              <a:shade val="15000"/>
+            </a:schemeClr>
+          </a:lnRef>
+          <a:fillRef idx="1">
+            <a:schemeClr val="accent3"/>
+          </a:fillRef>
+          <a:effectRef idx="0">
+            <a:schemeClr val="accent3"/>
+          </a:effectRef>
+          <a:fontRef idx="minor">
+            <a:schemeClr val="lt1"/>
+          </a:fontRef>
+        </p:style>
+        <p:txBody>
+          <a:bodyPr rtlCol="0" anchor="ctr"/>
+          <a:lstStyle/>
+          <a:p>
+            <a:pPr algn="ctr"/>
+            <a:r>
+              <a:rPr lang="en-US" b="1" dirty="0"/>
+              <a:t>Dev in Cursor </a:t>
+            </a:r>
+            <a:endParaRPr lang="en-US" dirty="0"/>
+          </a:p>
+        </p:txBody>
+      </p:sp>
+      <p:sp>
+        <p:nvSpPr>
+          <p:cNvPr id="36" name="Rectangle: Rounded Corners 35">
+            <a:extLst>
+              <a:ext uri="{FF2B5EF4-FFF2-40B4-BE49-F238E27FC236}">
+                <a16:creationId xmlns:a16="http://schemas.microsoft.com/office/drawing/2014/main" id="{F93FD3B6-03DE-B347-EA04-13432AA4E68C}"/>
+              </a:ext>
+            </a:extLst>
+          </p:cNvPr>
+          <p:cNvSpPr/>
+          <p:nvPr/>
+        </p:nvSpPr>
+        <p:spPr>
+          <a:xfrm>
+            <a:off x="4707467" y="453935"/>
+            <a:ext cx="2167467" cy="493187"/>
+          </a:xfrm>
+          <a:prstGeom prst="roundRect">
+            <a:avLst/>
+          </a:prstGeom>
+          <a:solidFill>
+            <a:srgbClr val="0B9486"/>
+          </a:solidFill>
+        </p:spPr>
+        <p:style>
+          <a:lnRef idx="2">
+            <a:schemeClr val="accent3">
+              <a:shade val="15000"/>
+            </a:schemeClr>
+          </a:lnRef>
+          <a:fillRef idx="1">
+            <a:schemeClr val="accent3"/>
+          </a:fillRef>
+          <a:effectRef idx="0">
+            <a:schemeClr val="accent3"/>
+          </a:effectRef>
+          <a:fontRef idx="minor">
+            <a:schemeClr val="lt1"/>
+          </a:fontRef>
+        </p:style>
+        <p:txBody>
+          <a:bodyPr rtlCol="0" anchor="ctr"/>
+          <a:lstStyle/>
+          <a:p>
+            <a:pPr algn="ctr"/>
+            <a:r>
+              <a:rPr lang="en-US" b="1" dirty="0"/>
+              <a:t>Deploy to </a:t>
+            </a:r>
+            <a:r>
+              <a:rPr lang="en-US" b="1" dirty="0" err="1"/>
+              <a:t>Github</a:t>
+            </a:r>
+            <a:endParaRPr lang="en-US" dirty="0"/>
+          </a:p>
+        </p:txBody>
+      </p:sp>
+      <p:sp>
+        <p:nvSpPr>
+          <p:cNvPr id="37" name="Rectangle: Rounded Corners 36">
+            <a:extLst>
+              <a:ext uri="{FF2B5EF4-FFF2-40B4-BE49-F238E27FC236}">
+                <a16:creationId xmlns:a16="http://schemas.microsoft.com/office/drawing/2014/main" id="{2C9E138A-F4F7-73A9-C013-CAB6150EE201}"/>
+              </a:ext>
+            </a:extLst>
+          </p:cNvPr>
+          <p:cNvSpPr/>
+          <p:nvPr/>
+        </p:nvSpPr>
+        <p:spPr>
+          <a:xfrm>
+            <a:off x="8178799" y="448161"/>
+            <a:ext cx="3031066" cy="493187"/>
+          </a:xfrm>
+          <a:prstGeom prst="roundRect">
+            <a:avLst/>
+          </a:prstGeom>
+          <a:solidFill>
+            <a:srgbClr val="0B9486"/>
+          </a:solidFill>
+        </p:spPr>
+        <p:style>
+          <a:lnRef idx="2">
+            <a:schemeClr val="accent3">
+              <a:shade val="15000"/>
+            </a:schemeClr>
+          </a:lnRef>
+          <a:fillRef idx="1">
+            <a:schemeClr val="accent3"/>
+          </a:fillRef>
+          <a:effectRef idx="0">
+            <a:schemeClr val="accent3"/>
+          </a:effectRef>
+          <a:fontRef idx="minor">
+            <a:schemeClr val="lt1"/>
+          </a:fontRef>
+        </p:style>
+        <p:txBody>
+          <a:bodyPr rtlCol="0" anchor="ctr"/>
+          <a:lstStyle/>
+          <a:p>
+            <a:pPr algn="ctr"/>
+            <a:r>
+              <a:rPr lang="en-US" b="1" dirty="0" err="1"/>
+              <a:t>Vercel</a:t>
+            </a:r>
+            <a:r>
+              <a:rPr lang="en-US" b="1" dirty="0"/>
+              <a:t> connects to </a:t>
+            </a:r>
+            <a:r>
+              <a:rPr lang="en-US" b="1" dirty="0" err="1"/>
+              <a:t>Github</a:t>
+            </a:r>
+            <a:endParaRPr lang="en-US" dirty="0"/>
+          </a:p>
+        </p:txBody>
+      </p:sp>
+      <p:cxnSp>
+        <p:nvCxnSpPr>
+          <p:cNvPr id="38" name="Straight Arrow Connector 37">
+            <a:extLst>
+              <a:ext uri="{FF2B5EF4-FFF2-40B4-BE49-F238E27FC236}">
+                <a16:creationId xmlns:a16="http://schemas.microsoft.com/office/drawing/2014/main" id="{41A2D8A7-7BC5-E3A4-9854-4E4C5E926DBD}"/>
+              </a:ext>
+            </a:extLst>
+          </p:cNvPr>
+          <p:cNvCxnSpPr/>
+          <p:nvPr/>
+        </p:nvCxnSpPr>
+        <p:spPr>
+          <a:xfrm>
+            <a:off x="2942169" y="694755"/>
+            <a:ext cx="1735665" cy="0"/>
+          </a:xfrm>
+          <a:prstGeom prst="straightConnector1">
+            <a:avLst/>
+          </a:prstGeom>
+          <a:ln w="19050" cap="flat" cmpd="sng" algn="ctr">
+            <a:solidFill>
+              <a:schemeClr val="accent3"/>
+            </a:solidFill>
+            <a:prstDash val="solid"/>
+            <a:round/>
+            <a:headEnd type="none" w="med" len="med"/>
+            <a:tailEnd type="arrow" w="med" len="med"/>
+          </a:ln>
+        </p:spPr>
+        <p:style>
+          <a:lnRef idx="0">
+            <a:scrgbClr r="0" g="0" b="0"/>
+          </a:lnRef>
+          <a:fillRef idx="0">
+            <a:scrgbClr r="0" g="0" b="0"/>
+          </a:fillRef>
+          <a:effectRef idx="0">
+            <a:scrgbClr r="0" g="0" b="0"/>
+          </a:effectRef>
+          <a:fontRef idx="minor">
+            <a:schemeClr val="tx1"/>
+          </a:fontRef>
+        </p:style>
+      </p:cxnSp>
+      <p:cxnSp>
+        <p:nvCxnSpPr>
+          <p:cNvPr id="39" name="Straight Arrow Connector 38">
+            <a:extLst>
+              <a:ext uri="{FF2B5EF4-FFF2-40B4-BE49-F238E27FC236}">
+                <a16:creationId xmlns:a16="http://schemas.microsoft.com/office/drawing/2014/main" id="{6C04F4E5-EEFA-52B8-E0B3-5C6BC2BEE69B}"/>
+              </a:ext>
+            </a:extLst>
+          </p:cNvPr>
+          <p:cNvCxnSpPr>
+            <a:cxnSpLocks/>
+            <a:endCxn id="37" idx="1"/>
+          </p:cNvCxnSpPr>
+          <p:nvPr/>
+        </p:nvCxnSpPr>
+        <p:spPr>
+          <a:xfrm>
+            <a:off x="6867085" y="694754"/>
+            <a:ext cx="1311714" cy="1"/>
+          </a:xfrm>
+          <a:prstGeom prst="straightConnector1">
+            <a:avLst/>
+          </a:prstGeom>
+          <a:ln w="19050" cap="flat" cmpd="sng" algn="ctr">
+            <a:solidFill>
+              <a:schemeClr val="accent3"/>
+            </a:solidFill>
+            <a:prstDash val="solid"/>
+            <a:round/>
+            <a:headEnd type="none" w="med" len="med"/>
+            <a:tailEnd type="arrow" w="med" len="med"/>
+          </a:ln>
+        </p:spPr>
+        <p:style>
+          <a:lnRef idx="0">
+            <a:scrgbClr r="0" g="0" b="0"/>
+          </a:lnRef>
+          <a:fillRef idx="0">
+            <a:scrgbClr r="0" g="0" b="0"/>
+          </a:fillRef>
+          <a:effectRef idx="0">
+            <a:scrgbClr r="0" g="0" b="0"/>
+          </a:effectRef>
+          <a:fontRef idx="minor">
+            <a:schemeClr val="tx1"/>
+          </a:fontRef>
+        </p:style>
+      </p:cxnSp>
+      <p:cxnSp>
+        <p:nvCxnSpPr>
+          <p:cNvPr id="41" name="Straight Connector 40">
+            <a:extLst>
+              <a:ext uri="{FF2B5EF4-FFF2-40B4-BE49-F238E27FC236}">
+                <a16:creationId xmlns:a16="http://schemas.microsoft.com/office/drawing/2014/main" id="{26C7BD33-5593-FB12-F16C-7589956292D1}"/>
+              </a:ext>
+            </a:extLst>
+          </p:cNvPr>
+          <p:cNvCxnSpPr/>
+          <p:nvPr/>
+        </p:nvCxnSpPr>
+        <p:spPr>
+          <a:xfrm>
+            <a:off x="1778000" y="1303867"/>
+            <a:ext cx="0" cy="626533"/>
+          </a:xfrm>
+          <a:prstGeom prst="line">
+            <a:avLst/>
+          </a:prstGeom>
+        </p:spPr>
+        <p:style>
+          <a:lnRef idx="2">
+            <a:schemeClr val="accent3"/>
+          </a:lnRef>
+          <a:fillRef idx="0">
+            <a:schemeClr val="accent3"/>
+          </a:fillRef>
+          <a:effectRef idx="1">
+            <a:schemeClr val="accent3"/>
+          </a:effectRef>
+          <a:fontRef idx="minor">
+            <a:schemeClr val="tx1"/>
+          </a:fontRef>
+        </p:style>
+      </p:cxnSp>
+      <p:cxnSp>
+        <p:nvCxnSpPr>
+          <p:cNvPr id="43" name="Straight Connector 42">
+            <a:extLst>
+              <a:ext uri="{FF2B5EF4-FFF2-40B4-BE49-F238E27FC236}">
+                <a16:creationId xmlns:a16="http://schemas.microsoft.com/office/drawing/2014/main" id="{C9507F22-9469-35E3-E1BD-96E54314CC58}"/>
+              </a:ext>
+            </a:extLst>
+          </p:cNvPr>
+          <p:cNvCxnSpPr/>
+          <p:nvPr/>
+        </p:nvCxnSpPr>
+        <p:spPr>
+          <a:xfrm>
+            <a:off x="1498600" y="1329267"/>
+            <a:ext cx="279400" cy="0"/>
+          </a:xfrm>
+          <a:prstGeom prst="line">
+            <a:avLst/>
+          </a:prstGeom>
+        </p:spPr>
+        <p:style>
+          <a:lnRef idx="2">
+            <a:schemeClr val="accent3"/>
+          </a:lnRef>
+          <a:fillRef idx="0">
+            <a:schemeClr val="accent3"/>
+          </a:fillRef>
+          <a:effectRef idx="1">
+            <a:schemeClr val="accent3"/>
+          </a:effectRef>
+          <a:fontRef idx="minor">
+            <a:schemeClr val="tx1"/>
+          </a:fontRef>
+        </p:style>
+      </p:cxnSp>
+      <p:cxnSp>
+        <p:nvCxnSpPr>
+          <p:cNvPr id="44" name="Straight Connector 43">
+            <a:extLst>
+              <a:ext uri="{FF2B5EF4-FFF2-40B4-BE49-F238E27FC236}">
+                <a16:creationId xmlns:a16="http://schemas.microsoft.com/office/drawing/2014/main" id="{C96959E7-87BE-6A75-42A4-2EF8255182C4}"/>
+              </a:ext>
+            </a:extLst>
+          </p:cNvPr>
+          <p:cNvCxnSpPr>
+            <a:cxnSpLocks/>
+          </p:cNvCxnSpPr>
+          <p:nvPr/>
+        </p:nvCxnSpPr>
+        <p:spPr>
+          <a:xfrm>
+            <a:off x="1498600" y="1634723"/>
+            <a:ext cx="364066" cy="0"/>
+          </a:xfrm>
+          <a:prstGeom prst="line">
+            <a:avLst/>
+          </a:prstGeom>
+        </p:spPr>
+        <p:style>
+          <a:lnRef idx="2">
+            <a:schemeClr val="accent3"/>
+          </a:lnRef>
+          <a:fillRef idx="0">
+            <a:schemeClr val="accent3"/>
+          </a:fillRef>
+          <a:effectRef idx="1">
+            <a:schemeClr val="accent3"/>
+          </a:effectRef>
+          <a:fontRef idx="minor">
+            <a:schemeClr val="tx1"/>
+          </a:fontRef>
+        </p:style>
+      </p:cxnSp>
+      <p:cxnSp>
+        <p:nvCxnSpPr>
+          <p:cNvPr id="45" name="Straight Connector 44">
+            <a:extLst>
+              <a:ext uri="{FF2B5EF4-FFF2-40B4-BE49-F238E27FC236}">
+                <a16:creationId xmlns:a16="http://schemas.microsoft.com/office/drawing/2014/main" id="{CE013B8F-C4A3-439D-FDA1-DEB13E32B78D}"/>
+              </a:ext>
+            </a:extLst>
+          </p:cNvPr>
+          <p:cNvCxnSpPr>
+            <a:cxnSpLocks/>
+          </p:cNvCxnSpPr>
+          <p:nvPr/>
+        </p:nvCxnSpPr>
+        <p:spPr>
+          <a:xfrm>
+            <a:off x="1574800" y="1930400"/>
+            <a:ext cx="203200" cy="0"/>
+          </a:xfrm>
+          <a:prstGeom prst="line">
+            <a:avLst/>
+          </a:prstGeom>
+        </p:spPr>
+        <p:style>
+          <a:lnRef idx="2">
+            <a:schemeClr val="accent3"/>
+          </a:lnRef>
+          <a:fillRef idx="0">
+            <a:schemeClr val="accent3"/>
+          </a:fillRef>
+          <a:effectRef idx="1">
+            <a:schemeClr val="accent3"/>
+          </a:effectRef>
+          <a:fontRef idx="minor">
+            <a:schemeClr val="tx1"/>
+          </a:fontRef>
+        </p:style>
+      </p:cxnSp>
+      <p:sp>
+        <p:nvSpPr>
+          <p:cNvPr id="54" name="Rectangle: Rounded Corners 53">
+            <a:extLst>
+              <a:ext uri="{FF2B5EF4-FFF2-40B4-BE49-F238E27FC236}">
+                <a16:creationId xmlns:a16="http://schemas.microsoft.com/office/drawing/2014/main" id="{F403B905-DE75-5487-3E76-3E19EB62F4D0}"/>
+              </a:ext>
+            </a:extLst>
+          </p:cNvPr>
+          <p:cNvSpPr/>
+          <p:nvPr/>
+        </p:nvSpPr>
+        <p:spPr>
+          <a:xfrm>
+            <a:off x="50796" y="4477696"/>
+            <a:ext cx="3344337" cy="2371780"/>
+          </a:xfrm>
+          <a:prstGeom prst="roundRect">
+            <a:avLst/>
+          </a:prstGeom>
+          <a:solidFill>
+            <a:srgbClr val="055E55"/>
+          </a:solidFill>
+        </p:spPr>
+        <p:style>
+          <a:lnRef idx="2">
+            <a:schemeClr val="accent3">
+              <a:shade val="15000"/>
+            </a:schemeClr>
+          </a:lnRef>
+          <a:fillRef idx="1">
+            <a:schemeClr val="accent3"/>
+          </a:fillRef>
+          <a:effectRef idx="0">
+            <a:schemeClr val="accent3"/>
+          </a:effectRef>
+          <a:fontRef idx="minor">
+            <a:schemeClr val="lt1"/>
+          </a:fontRef>
+        </p:style>
+        <p:txBody>
+          <a:bodyPr rtlCol="0" anchor="ctr"/>
+          <a:lstStyle/>
+          <a:p>
+            <a:r>
+              <a:rPr lang="en-US" dirty="0"/>
+              <a:t>PDF upload → </a:t>
+            </a:r>
+          </a:p>
+          <a:p>
+            <a:r>
+              <a:rPr lang="en-US" dirty="0"/>
+              <a:t>extract text → </a:t>
+            </a:r>
+          </a:p>
+          <a:p>
+            <a:r>
+              <a:rPr lang="en-US" dirty="0"/>
+              <a:t>preview obligations→</a:t>
+            </a:r>
+          </a:p>
+          <a:p>
+            <a:r>
+              <a:rPr lang="en-US" dirty="0"/>
+              <a:t>user confirm → </a:t>
+            </a:r>
+          </a:p>
+          <a:p>
+            <a:r>
+              <a:rPr lang="en-US" dirty="0" err="1"/>
+              <a:t>FinancialEvent</a:t>
+            </a:r>
+            <a:r>
+              <a:rPr lang="en-US" dirty="0"/>
+              <a:t> in ledger→ </a:t>
+            </a:r>
+          </a:p>
+          <a:p>
+            <a:r>
+              <a:rPr lang="en-US" dirty="0"/>
+              <a:t>copy also → RAG chunks + Obsidian wiki</a:t>
+            </a:r>
+          </a:p>
+        </p:txBody>
+      </p:sp>
+      <p:sp>
+        <p:nvSpPr>
+          <p:cNvPr id="55" name="Rectangle: Rounded Corners 54">
+            <a:extLst>
+              <a:ext uri="{FF2B5EF4-FFF2-40B4-BE49-F238E27FC236}">
+                <a16:creationId xmlns:a16="http://schemas.microsoft.com/office/drawing/2014/main" id="{A578D2E2-0E21-FE38-C86A-1F5C185599F2}"/>
+              </a:ext>
+            </a:extLst>
+          </p:cNvPr>
+          <p:cNvSpPr/>
+          <p:nvPr/>
+        </p:nvSpPr>
+        <p:spPr>
+          <a:xfrm>
+            <a:off x="4287615" y="4476525"/>
+            <a:ext cx="3569452" cy="2371780"/>
+          </a:xfrm>
+          <a:prstGeom prst="roundRect">
+            <a:avLst/>
+          </a:prstGeom>
+          <a:solidFill>
+            <a:srgbClr val="055E55"/>
+          </a:solidFill>
+        </p:spPr>
+        <p:style>
+          <a:lnRef idx="2">
+            <a:schemeClr val="accent3">
+              <a:shade val="15000"/>
+            </a:schemeClr>
+          </a:lnRef>
+          <a:fillRef idx="1">
+            <a:schemeClr val="accent3"/>
+          </a:fillRef>
+          <a:effectRef idx="0">
+            <a:schemeClr val="accent3"/>
+          </a:effectRef>
+          <a:fontRef idx="minor">
+            <a:schemeClr val="lt1"/>
+          </a:fontRef>
+        </p:style>
+        <p:txBody>
+          <a:bodyPr rtlCol="0" anchor="ctr"/>
+          <a:lstStyle/>
+          <a:p>
+            <a:r>
+              <a:rPr lang="en-US" dirty="0"/>
+              <a:t>Plaid Link → </a:t>
+            </a:r>
+          </a:p>
+          <a:p>
+            <a:r>
+              <a:rPr lang="en-US" dirty="0"/>
+              <a:t>sync balances → </a:t>
+            </a:r>
+          </a:p>
+          <a:p>
+            <a:r>
+              <a:rPr lang="en-US" dirty="0"/>
+              <a:t>checking → </a:t>
+            </a:r>
+          </a:p>
+          <a:p>
+            <a:r>
+              <a:rPr lang="en-US" dirty="0" err="1"/>
+              <a:t>current_cash</a:t>
+            </a:r>
+            <a:r>
+              <a:rPr lang="en-US" dirty="0"/>
+              <a:t>→ opening balance</a:t>
+            </a:r>
+          </a:p>
+          <a:p>
+            <a:r>
+              <a:rPr lang="en-US" dirty="0"/>
+              <a:t>all accounts → </a:t>
+            </a:r>
+          </a:p>
+          <a:p>
+            <a:r>
+              <a:rPr lang="en-US" dirty="0"/>
+              <a:t>balance history + disposable view</a:t>
+            </a:r>
+          </a:p>
+        </p:txBody>
+      </p:sp>
+      <p:sp>
+        <p:nvSpPr>
+          <p:cNvPr id="56" name="Rectangle: Rounded Corners 55">
+            <a:extLst>
+              <a:ext uri="{FF2B5EF4-FFF2-40B4-BE49-F238E27FC236}">
+                <a16:creationId xmlns:a16="http://schemas.microsoft.com/office/drawing/2014/main" id="{4304A81A-D02B-CB52-AE24-24D3D14BD16F}"/>
+              </a:ext>
+            </a:extLst>
+          </p:cNvPr>
+          <p:cNvSpPr/>
+          <p:nvPr/>
+        </p:nvSpPr>
+        <p:spPr>
+          <a:xfrm>
+            <a:off x="8796867" y="4477696"/>
+            <a:ext cx="3344337" cy="2371780"/>
+          </a:xfrm>
+          <a:prstGeom prst="roundRect">
+            <a:avLst/>
+          </a:prstGeom>
+          <a:solidFill>
+            <a:srgbClr val="055E55"/>
+          </a:solidFill>
+        </p:spPr>
+        <p:style>
+          <a:lnRef idx="2">
+            <a:schemeClr val="accent3">
+              <a:shade val="15000"/>
+            </a:schemeClr>
+          </a:lnRef>
+          <a:fillRef idx="1">
+            <a:schemeClr val="accent3"/>
+          </a:fillRef>
+          <a:effectRef idx="0">
+            <a:schemeClr val="accent3"/>
+          </a:effectRef>
+          <a:fontRef idx="minor">
+            <a:schemeClr val="lt1"/>
+          </a:fontRef>
+        </p:style>
+        <p:txBody>
+          <a:bodyPr rtlCol="0" anchor="ctr"/>
+          <a:lstStyle/>
+          <a:p>
+            <a:r>
+              <a:rPr lang="en-US" dirty="0"/>
+              <a:t>Scenario Chat / Telegram</a:t>
+            </a:r>
+          </a:p>
+          <a:p>
+            <a:r>
+              <a:rPr lang="en-US" dirty="0"/>
+              <a:t>→</a:t>
+            </a:r>
+          </a:p>
+          <a:p>
+            <a:r>
+              <a:rPr lang="en-US" dirty="0"/>
+              <a:t>route: ledger lookup | forecast what-if | RAG document</a:t>
+            </a:r>
+          </a:p>
+          <a:p>
+            <a:r>
+              <a:rPr lang="en-US" dirty="0"/>
+              <a:t>→ </a:t>
+            </a:r>
+          </a:p>
+          <a:p>
+            <a:r>
+              <a:rPr lang="en-US" dirty="0"/>
+              <a:t>answer with numbers + short explanation</a:t>
+            </a:r>
+          </a:p>
+        </p:txBody>
+      </p:sp>
     </p:spTree>
     <p:extLst>
       <p:ext uri="{BB962C8B-B14F-4D97-AF65-F5344CB8AC3E}">
